--- a/prompt-engineering-course/prompt_engineering_presentation_support/PE_S2_techniques.pptx
+++ b/prompt-engineering-course/prompt_engineering_presentation_support/PE_S2_techniques.pptx
@@ -2228,8 +2228,47 @@
         </p:nvSpPr>
         <p:spPr>
           <a:xfrm>
-            <a:off x="548640" y="2011680"/>
-            <a:ext cx="6126480" cy="3840480"/>
+            <a:off x="548640" y="1627632"/>
+            <a:ext cx="10881360" cy="502920"/>
+          </a:xfrm>
+          <a:prstGeom prst="rect">
+            <a:avLst/>
+          </a:prstGeom>
+          <a:noFill/>
+          <a:ln/>
+        </p:spPr>
+        <p:txBody>
+          <a:bodyPr wrap="square" lIns="0" tIns="0" rIns="0" bIns="0" rtlCol="0" anchor="t"/>
+          <a:lstStyle/>
+          <a:p>
+            <a:pPr algn="l" indent="0" marL="0">
+              <a:buNone/>
+            </a:pPr>
+            <a:r>
+              <a:rPr lang="en-US" sz="1500" dirty="0">
+                <a:solidFill>
+                  <a:srgbClr val="A9B1D6"/>
+                </a:solidFill>
+                <a:latin typeface="Calibri" pitchFamily="34" charset="0"/>
+                <a:ea typeface="Calibri" pitchFamily="34" charset="-122"/>
+                <a:cs typeface="Calibri" pitchFamily="34" charset="-120"/>
+              </a:rPr>
+              <a:t>When a prompt misbehaves it's usually one of these four — think of this as your debugging checklist.</a:t>
+            </a:r>
+            <a:endParaRPr lang="en-US" sz="1500" dirty="0"/>
+          </a:p>
+        </p:txBody>
+      </p:sp>
+      <p:sp>
+        <p:nvSpPr>
+          <p:cNvPr id="5" name="Text 3"/>
+          <p:cNvSpPr txBox="1"/>
+          <p:nvPr/>
+        </p:nvSpPr>
+        <p:spPr>
+          <a:xfrm>
+            <a:off x="548640" y="2340864"/>
+            <a:ext cx="6126480" cy="3511296"/>
           </a:xfrm>
           <a:prstGeom prst="rect">
             <a:avLst/>
@@ -2408,18 +2447,18 @@
       </p:sp>
       <p:sp>
         <p:nvSpPr>
-          <p:cNvPr id="5" name="Shape 3"/>
+          <p:cNvPr id="6" name="Shape 4"/>
           <p:cNvSpPr/>
           <p:nvPr/>
         </p:nvSpPr>
         <p:spPr>
           <a:xfrm>
-            <a:off x="6995160" y="2148840"/>
-            <a:ext cx="4645152" cy="3383280"/>
+            <a:off x="6995160" y="2478024"/>
+            <a:ext cx="4645152" cy="3054096"/>
           </a:xfrm>
           <a:prstGeom prst="roundRect">
             <a:avLst>
-              <a:gd name="adj" fmla="val 2432"/>
+              <a:gd name="adj" fmla="val 2695"/>
             </a:avLst>
           </a:prstGeom>
           <a:solidFill>
@@ -2435,13 +2474,13 @@
       </p:sp>
       <p:sp>
         <p:nvSpPr>
-          <p:cNvPr id="6" name="Shape 4"/>
+          <p:cNvPr id="7" name="Shape 5"/>
           <p:cNvSpPr/>
           <p:nvPr/>
         </p:nvSpPr>
         <p:spPr>
           <a:xfrm>
-            <a:off x="7269480" y="2423160"/>
+            <a:off x="7269480" y="2752344"/>
             <a:ext cx="457200" cy="457200"/>
           </a:xfrm>
           <a:prstGeom prst="ellipse">
@@ -2455,13 +2494,13 @@
       </p:sp>
       <p:sp>
         <p:nvSpPr>
-          <p:cNvPr id="7" name="Text 5"/>
-          <p:cNvSpPr txBox="1"/>
-          <p:nvPr/>
-        </p:nvSpPr>
-        <p:spPr>
-          <a:xfrm>
-            <a:off x="7818120" y="2450592"/>
+          <p:cNvPr id="8" name="Text 6"/>
+          <p:cNvSpPr txBox="1"/>
+          <p:nvPr/>
+        </p:nvSpPr>
+        <p:spPr>
+          <a:xfrm>
+            <a:off x="7818120" y="2779776"/>
             <a:ext cx="3657600" cy="411480"/>
           </a:xfrm>
           <a:prstGeom prst="rect">
@@ -2494,14 +2533,14 @@
       </p:sp>
       <p:sp>
         <p:nvSpPr>
-          <p:cNvPr id="8" name="Text 6"/>
-          <p:cNvSpPr txBox="1"/>
-          <p:nvPr/>
-        </p:nvSpPr>
-        <p:spPr>
-          <a:xfrm>
-            <a:off x="7269480" y="3108960"/>
-            <a:ext cx="4160520" cy="2286000"/>
+          <p:cNvPr id="9" name="Text 7"/>
+          <p:cNvSpPr txBox="1"/>
+          <p:nvPr/>
+        </p:nvSpPr>
+        <p:spPr>
+          <a:xfrm>
+            <a:off x="7269480" y="3438144"/>
+            <a:ext cx="4160520" cy="1865376"/>
           </a:xfrm>
           <a:prstGeom prst="rect">
             <a:avLst/>
@@ -2533,7 +2572,7 @@
       </p:sp>
       <p:sp>
         <p:nvSpPr>
-          <p:cNvPr id="9" name="Shape 7"/>
+          <p:cNvPr id="10" name="Shape 8"/>
           <p:cNvSpPr/>
           <p:nvPr/>
         </p:nvSpPr>
@@ -2555,7 +2594,7 @@
       </p:sp>
       <p:sp>
         <p:nvSpPr>
-          <p:cNvPr id="10" name="Text 8"/>
+          <p:cNvPr id="11" name="Text 9"/>
           <p:cNvSpPr txBox="1"/>
           <p:nvPr/>
         </p:nvSpPr>
@@ -2594,7 +2633,7 @@
       </p:sp>
       <p:sp>
         <p:nvSpPr>
-          <p:cNvPr id="11" name="Text 9"/>
+          <p:cNvPr id="12" name="Text 10"/>
           <p:cNvSpPr txBox="1"/>
           <p:nvPr/>
         </p:nvSpPr>
@@ -2633,7 +2672,7 @@
       </p:sp>
       <p:sp>
         <p:nvSpPr>
-          <p:cNvPr id="12" name="Text 10"/>
+          <p:cNvPr id="13" name="Text 11"/>
           <p:cNvSpPr txBox="1"/>
           <p:nvPr/>
         </p:nvSpPr>
@@ -4852,7 +4891,7 @@
     <p:bg>
       <p:bgPr>
         <a:solidFill>
-          <a:srgbClr val="281C16"/>
+          <a:srgbClr val="301A12"/>
         </a:solidFill>
       </p:bgPr>
     </p:bg>
@@ -4878,12 +4917,12 @@
         </p:nvSpPr>
         <p:spPr>
           <a:xfrm>
-            <a:off x="10588752" y="502920"/>
-            <a:ext cx="1051560" cy="384048"/>
+            <a:off x="10405872" y="457200"/>
+            <a:ext cx="1234440" cy="457200"/>
           </a:xfrm>
           <a:prstGeom prst="roundRect">
             <a:avLst>
-              <a:gd name="adj" fmla="val 47619"/>
+              <a:gd name="adj" fmla="val 20000"/>
             </a:avLst>
           </a:prstGeom>
           <a:solidFill>
@@ -4900,8 +4939,8 @@
         </p:nvSpPr>
         <p:spPr>
           <a:xfrm>
-            <a:off x="10588752" y="502920"/>
-            <a:ext cx="1051560" cy="384048"/>
+            <a:off x="10405872" y="457200"/>
+            <a:ext cx="1234440" cy="457200"/>
           </a:xfrm>
           <a:prstGeom prst="rect">
             <a:avLst/>
@@ -4917,17 +4956,17 @@
               <a:buNone/>
             </a:pPr>
             <a:r>
-              <a:rPr lang="en-US" sz="1300" b="1" spc="200" kern="0" dirty="0">
-                <a:solidFill>
-                  <a:srgbClr val="281C16"/>
+              <a:rPr lang="en-US" sz="1400" b="1" spc="200" kern="0" dirty="0">
+                <a:solidFill>
+                  <a:srgbClr val="301A12"/>
                 </a:solidFill>
                 <a:latin typeface="Courier New" pitchFamily="34" charset="0"/>
                 <a:ea typeface="Courier New" pitchFamily="34" charset="-122"/>
                 <a:cs typeface="Courier New" pitchFamily="34" charset="-120"/>
               </a:rPr>
-              <a:t>GIT</a:t>
-            </a:r>
-            <a:endParaRPr lang="en-US" sz="1300" dirty="0"/>
+              <a:t>● GIT</a:t>
+            </a:r>
+            <a:endParaRPr lang="en-US" sz="1400" dirty="0"/>
           </a:p>
         </p:txBody>
       </p:sp>
@@ -4997,7 +5036,7 @@
             <a:r>
               <a:rPr lang="en-US" sz="3400" b="1" dirty="0">
                 <a:solidFill>
-                  <a:srgbClr val="C0CAF5"/>
+                  <a:srgbClr val="F6E6DB"/>
                 </a:solidFill>
                 <a:latin typeface="Calibri" pitchFamily="34" charset="0"/>
                 <a:ea typeface="Calibri" pitchFamily="34" charset="-122"/>
@@ -5056,7 +5095,7 @@
             <a:r>
               <a:rPr lang="en-US" sz="1800" b="1" dirty="0">
                 <a:solidFill>
-                  <a:srgbClr val="1A1B26"/>
+                  <a:srgbClr val="301A12"/>
                 </a:solidFill>
                 <a:latin typeface="Courier New" pitchFamily="34" charset="0"/>
                 <a:ea typeface="Courier New" pitchFamily="34" charset="-122"/>
@@ -5095,7 +5134,7 @@
             <a:r>
               <a:rPr lang="en-US" sz="1700" b="1" dirty="0">
                 <a:solidFill>
-                  <a:srgbClr val="C0CAF5"/>
+                  <a:srgbClr val="F6E6DB"/>
                 </a:solidFill>
                 <a:latin typeface="Calibri" pitchFamily="34" charset="0"/>
                 <a:ea typeface="Calibri" pitchFamily="34" charset="-122"/>
@@ -5134,7 +5173,7 @@
             <a:r>
               <a:rPr lang="en-US" sz="1350" dirty="0">
                 <a:solidFill>
-                  <a:srgbClr val="A9B1D6"/>
+                  <a:srgbClr val="E0C6B6"/>
                 </a:solidFill>
                 <a:latin typeface="Calibri" pitchFamily="34" charset="0"/>
                 <a:ea typeface="Calibri" pitchFamily="34" charset="-122"/>
@@ -5193,7 +5232,7 @@
             <a:r>
               <a:rPr lang="en-US" sz="1800" b="1" dirty="0">
                 <a:solidFill>
-                  <a:srgbClr val="1A1B26"/>
+                  <a:srgbClr val="301A12"/>
                 </a:solidFill>
                 <a:latin typeface="Courier New" pitchFamily="34" charset="0"/>
                 <a:ea typeface="Courier New" pitchFamily="34" charset="-122"/>
@@ -5232,7 +5271,7 @@
             <a:r>
               <a:rPr lang="en-US" sz="1700" b="1" dirty="0">
                 <a:solidFill>
-                  <a:srgbClr val="C0CAF5"/>
+                  <a:srgbClr val="F6E6DB"/>
                 </a:solidFill>
                 <a:latin typeface="Calibri" pitchFamily="34" charset="0"/>
                 <a:ea typeface="Calibri" pitchFamily="34" charset="-122"/>
@@ -5271,7 +5310,7 @@
             <a:r>
               <a:rPr lang="en-US" sz="1350" dirty="0">
                 <a:solidFill>
-                  <a:srgbClr val="A9B1D6"/>
+                  <a:srgbClr val="E0C6B6"/>
                 </a:solidFill>
                 <a:latin typeface="Calibri" pitchFamily="34" charset="0"/>
                 <a:ea typeface="Calibri" pitchFamily="34" charset="-122"/>
@@ -5330,7 +5369,7 @@
             <a:r>
               <a:rPr lang="en-US" sz="1800" b="1" dirty="0">
                 <a:solidFill>
-                  <a:srgbClr val="1A1B26"/>
+                  <a:srgbClr val="301A12"/>
                 </a:solidFill>
                 <a:latin typeface="Courier New" pitchFamily="34" charset="0"/>
                 <a:ea typeface="Courier New" pitchFamily="34" charset="-122"/>
@@ -5369,7 +5408,7 @@
             <a:r>
               <a:rPr lang="en-US" sz="1700" b="1" dirty="0">
                 <a:solidFill>
-                  <a:srgbClr val="C0CAF5"/>
+                  <a:srgbClr val="F6E6DB"/>
                 </a:solidFill>
                 <a:latin typeface="Calibri" pitchFamily="34" charset="0"/>
                 <a:ea typeface="Calibri" pitchFamily="34" charset="-122"/>
@@ -5408,7 +5447,7 @@
             <a:r>
               <a:rPr lang="en-US" sz="1350" dirty="0">
                 <a:solidFill>
-                  <a:srgbClr val="A9B1D6"/>
+                  <a:srgbClr val="E0C6B6"/>
                 </a:solidFill>
                 <a:latin typeface="Calibri" pitchFamily="34" charset="0"/>
                 <a:ea typeface="Calibri" pitchFamily="34" charset="-122"/>
@@ -5467,7 +5506,7 @@
             <a:r>
               <a:rPr lang="en-US" sz="1800" b="1" dirty="0">
                 <a:solidFill>
-                  <a:srgbClr val="1A1B26"/>
+                  <a:srgbClr val="301A12"/>
                 </a:solidFill>
                 <a:latin typeface="Courier New" pitchFamily="34" charset="0"/>
                 <a:ea typeface="Courier New" pitchFamily="34" charset="-122"/>
@@ -5506,7 +5545,7 @@
             <a:r>
               <a:rPr lang="en-US" sz="1700" b="1" dirty="0">
                 <a:solidFill>
-                  <a:srgbClr val="C0CAF5"/>
+                  <a:srgbClr val="F6E6DB"/>
                 </a:solidFill>
                 <a:latin typeface="Calibri" pitchFamily="34" charset="0"/>
                 <a:ea typeface="Calibri" pitchFamily="34" charset="-122"/>
@@ -5545,7 +5584,7 @@
             <a:r>
               <a:rPr lang="en-US" sz="1350" dirty="0">
                 <a:solidFill>
-                  <a:srgbClr val="A9B1D6"/>
+                  <a:srgbClr val="E0C6B6"/>
                 </a:solidFill>
                 <a:latin typeface="Calibri" pitchFamily="34" charset="0"/>
                 <a:ea typeface="Calibri" pitchFamily="34" charset="-122"/>
@@ -5710,7 +5749,7 @@
     <p:bg>
       <p:bgPr>
         <a:solidFill>
-          <a:srgbClr val="281C16"/>
+          <a:srgbClr val="301A12"/>
         </a:solidFill>
       </p:bgPr>
     </p:bg>
@@ -5736,12 +5775,12 @@
         </p:nvSpPr>
         <p:spPr>
           <a:xfrm>
-            <a:off x="10588752" y="502920"/>
-            <a:ext cx="1051560" cy="384048"/>
+            <a:off x="10405872" y="457200"/>
+            <a:ext cx="1234440" cy="457200"/>
           </a:xfrm>
           <a:prstGeom prst="roundRect">
             <a:avLst>
-              <a:gd name="adj" fmla="val 47619"/>
+              <a:gd name="adj" fmla="val 20000"/>
             </a:avLst>
           </a:prstGeom>
           <a:solidFill>
@@ -5758,8 +5797,8 @@
         </p:nvSpPr>
         <p:spPr>
           <a:xfrm>
-            <a:off x="10588752" y="502920"/>
-            <a:ext cx="1051560" cy="384048"/>
+            <a:off x="10405872" y="457200"/>
+            <a:ext cx="1234440" cy="457200"/>
           </a:xfrm>
           <a:prstGeom prst="rect">
             <a:avLst/>
@@ -5775,17 +5814,17 @@
               <a:buNone/>
             </a:pPr>
             <a:r>
-              <a:rPr lang="en-US" sz="1300" b="1" spc="200" kern="0" dirty="0">
-                <a:solidFill>
-                  <a:srgbClr val="281C16"/>
+              <a:rPr lang="en-US" sz="1400" b="1" spc="200" kern="0" dirty="0">
+                <a:solidFill>
+                  <a:srgbClr val="301A12"/>
                 </a:solidFill>
                 <a:latin typeface="Courier New" pitchFamily="34" charset="0"/>
                 <a:ea typeface="Courier New" pitchFamily="34" charset="-122"/>
                 <a:cs typeface="Courier New" pitchFamily="34" charset="-120"/>
               </a:rPr>
-              <a:t>GIT</a:t>
-            </a:r>
-            <a:endParaRPr lang="en-US" sz="1300" dirty="0"/>
+              <a:t>● GIT</a:t>
+            </a:r>
+            <a:endParaRPr lang="en-US" sz="1400" dirty="0"/>
           </a:p>
         </p:txBody>
       </p:sp>
@@ -5855,7 +5894,7 @@
             <a:r>
               <a:rPr lang="en-US" sz="3400" b="1" dirty="0">
                 <a:solidFill>
-                  <a:srgbClr val="C0CAF5"/>
+                  <a:srgbClr val="F6E6DB"/>
                 </a:solidFill>
                 <a:latin typeface="Calibri" pitchFamily="34" charset="0"/>
                 <a:ea typeface="Calibri" pitchFamily="34" charset="-122"/>
@@ -5898,7 +5937,7 @@
             <a:r>
               <a:rPr lang="en-US" sz="1500" dirty="0">
                 <a:solidFill>
-                  <a:srgbClr val="A9B1D6"/>
+                  <a:srgbClr val="E0C6B6"/>
                 </a:solidFill>
                 <a:latin typeface="Calibri" pitchFamily="34" charset="0"/>
                 <a:ea typeface="Calibri" pitchFamily="34" charset="-122"/>
@@ -5919,7 +5958,7 @@
             <a:r>
               <a:rPr lang="en-US" sz="1500" dirty="0">
                 <a:solidFill>
-                  <a:srgbClr val="A9B1D6"/>
+                  <a:srgbClr val="E0C6B6"/>
                 </a:solidFill>
                 <a:latin typeface="Calibri" pitchFamily="34" charset="0"/>
                 <a:ea typeface="Calibri" pitchFamily="34" charset="-122"/>
@@ -5940,7 +5979,7 @@
             <a:r>
               <a:rPr lang="en-US" sz="1500" dirty="0">
                 <a:solidFill>
-                  <a:srgbClr val="A9B1D6"/>
+                  <a:srgbClr val="E0C6B6"/>
                 </a:solidFill>
                 <a:latin typeface="Calibri" pitchFamily="34" charset="0"/>
                 <a:ea typeface="Calibri" pitchFamily="34" charset="-122"/>
@@ -5961,7 +6000,7 @@
             <a:r>
               <a:rPr lang="en-US" sz="1500" dirty="0">
                 <a:solidFill>
-                  <a:srgbClr val="A9B1D6"/>
+                  <a:srgbClr val="E0C6B6"/>
                 </a:solidFill>
                 <a:latin typeface="Calibri" pitchFamily="34" charset="0"/>
                 <a:ea typeface="Calibri" pitchFamily="34" charset="-122"/>
@@ -5990,11 +6029,11 @@
             </a:avLst>
           </a:prstGeom>
           <a:solidFill>
-            <a:srgbClr val="16161E"/>
+            <a:srgbClr val="22120B"/>
           </a:solidFill>
           <a:ln w="12700">
             <a:solidFill>
-              <a:srgbClr val="2A2E42"/>
+              <a:srgbClr val="5C3421"/>
             </a:solidFill>
             <a:prstDash val="solid"/>
           </a:ln>
@@ -6492,13 +6531,52 @@
       </p:sp>
       <p:sp>
         <p:nvSpPr>
-          <p:cNvPr id="4" name="Shape 2"/>
+          <p:cNvPr id="4" name="Text 2"/>
+          <p:cNvSpPr txBox="1"/>
+          <p:nvPr/>
+        </p:nvSpPr>
+        <p:spPr>
+          <a:xfrm>
+            <a:off x="548640" y="1627632"/>
+            <a:ext cx="10881360" cy="502920"/>
+          </a:xfrm>
+          <a:prstGeom prst="rect">
+            <a:avLst/>
+          </a:prstGeom>
+          <a:noFill/>
+          <a:ln/>
+        </p:spPr>
+        <p:txBody>
+          <a:bodyPr wrap="square" lIns="0" tIns="0" rIns="0" bIns="0" rtlCol="0" anchor="t"/>
+          <a:lstStyle/>
+          <a:p>
+            <a:pPr algn="l" indent="0" marL="0">
+              <a:buNone/>
+            </a:pPr>
+            <a:r>
+              <a:rPr lang="en-US" sz="1500" dirty="0">
+                <a:solidFill>
+                  <a:srgbClr val="A9B1D6"/>
+                </a:solidFill>
+                <a:latin typeface="Calibri" pitchFamily="34" charset="0"/>
+                <a:ea typeface="Calibri" pitchFamily="34" charset="-122"/>
+                <a:cs typeface="Calibri" pitchFamily="34" charset="-120"/>
+              </a:rPr>
+              <a:t>Almost everything you do to a prompt is a turn of one of these four dials — keep them in mind all course.</a:t>
+            </a:r>
+            <a:endParaRPr lang="en-US" sz="1500" dirty="0"/>
+          </a:p>
+        </p:txBody>
+      </p:sp>
+      <p:sp>
+        <p:nvSpPr>
+          <p:cNvPr id="5" name="Shape 3"/>
           <p:cNvSpPr/>
           <p:nvPr/>
         </p:nvSpPr>
         <p:spPr>
           <a:xfrm>
-            <a:off x="548640" y="2103120"/>
+            <a:off x="548640" y="2432304"/>
             <a:ext cx="5394960" cy="1810512"/>
           </a:xfrm>
           <a:prstGeom prst="roundRect">
@@ -6519,13 +6597,13 @@
       </p:sp>
       <p:sp>
         <p:nvSpPr>
-          <p:cNvPr id="5" name="Shape 3"/>
+          <p:cNvPr id="6" name="Shape 4"/>
           <p:cNvSpPr/>
           <p:nvPr/>
         </p:nvSpPr>
         <p:spPr>
           <a:xfrm>
-            <a:off x="822960" y="2395728"/>
+            <a:off x="822960" y="2724912"/>
             <a:ext cx="548640" cy="548640"/>
           </a:xfrm>
           <a:prstGeom prst="ellipse">
@@ -6539,13 +6617,13 @@
       </p:sp>
       <p:sp>
         <p:nvSpPr>
-          <p:cNvPr id="6" name="Text 4"/>
-          <p:cNvSpPr txBox="1"/>
-          <p:nvPr/>
-        </p:nvSpPr>
-        <p:spPr>
-          <a:xfrm>
-            <a:off x="822960" y="2395728"/>
+          <p:cNvPr id="7" name="Text 5"/>
+          <p:cNvSpPr txBox="1"/>
+          <p:nvPr/>
+        </p:nvSpPr>
+        <p:spPr>
+          <a:xfrm>
+            <a:off x="822960" y="2724912"/>
             <a:ext cx="548640" cy="548640"/>
           </a:xfrm>
           <a:prstGeom prst="rect">
@@ -6578,13 +6656,13 @@
       </p:sp>
       <p:sp>
         <p:nvSpPr>
-          <p:cNvPr id="7" name="Text 5"/>
-          <p:cNvSpPr txBox="1"/>
-          <p:nvPr/>
-        </p:nvSpPr>
-        <p:spPr>
-          <a:xfrm>
-            <a:off x="1508760" y="2359152"/>
+          <p:cNvPr id="8" name="Text 6"/>
+          <p:cNvSpPr txBox="1"/>
+          <p:nvPr/>
+        </p:nvSpPr>
+        <p:spPr>
+          <a:xfrm>
+            <a:off x="1508760" y="2688336"/>
             <a:ext cx="4206240" cy="548640"/>
           </a:xfrm>
           <a:prstGeom prst="rect">
@@ -6617,13 +6695,13 @@
       </p:sp>
       <p:sp>
         <p:nvSpPr>
-          <p:cNvPr id="8" name="Text 6"/>
-          <p:cNvSpPr txBox="1"/>
-          <p:nvPr/>
-        </p:nvSpPr>
-        <p:spPr>
-          <a:xfrm>
-            <a:off x="822960" y="3017520"/>
+          <p:cNvPr id="9" name="Text 7"/>
+          <p:cNvSpPr txBox="1"/>
+          <p:nvPr/>
+        </p:nvSpPr>
+        <p:spPr>
+          <a:xfrm>
+            <a:off x="822960" y="3346704"/>
             <a:ext cx="4846320" cy="822960"/>
           </a:xfrm>
           <a:prstGeom prst="rect">
@@ -6656,13 +6734,13 @@
       </p:sp>
       <p:sp>
         <p:nvSpPr>
-          <p:cNvPr id="9" name="Shape 7"/>
+          <p:cNvPr id="10" name="Shape 8"/>
           <p:cNvSpPr/>
           <p:nvPr/>
         </p:nvSpPr>
         <p:spPr>
           <a:xfrm>
-            <a:off x="6245352" y="2103120"/>
+            <a:off x="6245352" y="2432304"/>
             <a:ext cx="5394960" cy="1810512"/>
           </a:xfrm>
           <a:prstGeom prst="roundRect">
@@ -6683,13 +6761,13 @@
       </p:sp>
       <p:sp>
         <p:nvSpPr>
-          <p:cNvPr id="10" name="Shape 8"/>
+          <p:cNvPr id="11" name="Shape 9"/>
           <p:cNvSpPr/>
           <p:nvPr/>
         </p:nvSpPr>
         <p:spPr>
           <a:xfrm>
-            <a:off x="6519672" y="2395728"/>
+            <a:off x="6519672" y="2724912"/>
             <a:ext cx="548640" cy="548640"/>
           </a:xfrm>
           <a:prstGeom prst="ellipse">
@@ -6703,13 +6781,13 @@
       </p:sp>
       <p:sp>
         <p:nvSpPr>
-          <p:cNvPr id="11" name="Text 9"/>
-          <p:cNvSpPr txBox="1"/>
-          <p:nvPr/>
-        </p:nvSpPr>
-        <p:spPr>
-          <a:xfrm>
-            <a:off x="6519672" y="2395728"/>
+          <p:cNvPr id="12" name="Text 10"/>
+          <p:cNvSpPr txBox="1"/>
+          <p:nvPr/>
+        </p:nvSpPr>
+        <p:spPr>
+          <a:xfrm>
+            <a:off x="6519672" y="2724912"/>
             <a:ext cx="548640" cy="548640"/>
           </a:xfrm>
           <a:prstGeom prst="rect">
@@ -6742,13 +6820,13 @@
       </p:sp>
       <p:sp>
         <p:nvSpPr>
-          <p:cNvPr id="12" name="Text 10"/>
-          <p:cNvSpPr txBox="1"/>
-          <p:nvPr/>
-        </p:nvSpPr>
-        <p:spPr>
-          <a:xfrm>
-            <a:off x="7205472" y="2359152"/>
+          <p:cNvPr id="13" name="Text 11"/>
+          <p:cNvSpPr txBox="1"/>
+          <p:nvPr/>
+        </p:nvSpPr>
+        <p:spPr>
+          <a:xfrm>
+            <a:off x="7205472" y="2688336"/>
             <a:ext cx="4206240" cy="548640"/>
           </a:xfrm>
           <a:prstGeom prst="rect">
@@ -6781,13 +6859,13 @@
       </p:sp>
       <p:sp>
         <p:nvSpPr>
-          <p:cNvPr id="13" name="Text 11"/>
-          <p:cNvSpPr txBox="1"/>
-          <p:nvPr/>
-        </p:nvSpPr>
-        <p:spPr>
-          <a:xfrm>
-            <a:off x="6519672" y="3017520"/>
+          <p:cNvPr id="14" name="Text 12"/>
+          <p:cNvSpPr txBox="1"/>
+          <p:nvPr/>
+        </p:nvSpPr>
+        <p:spPr>
+          <a:xfrm>
+            <a:off x="6519672" y="3346704"/>
             <a:ext cx="4846320" cy="822960"/>
           </a:xfrm>
           <a:prstGeom prst="rect">
@@ -6820,13 +6898,13 @@
       </p:sp>
       <p:sp>
         <p:nvSpPr>
-          <p:cNvPr id="14" name="Shape 12"/>
+          <p:cNvPr id="15" name="Shape 13"/>
           <p:cNvSpPr/>
           <p:nvPr/>
         </p:nvSpPr>
         <p:spPr>
           <a:xfrm>
-            <a:off x="548640" y="4114800"/>
+            <a:off x="548640" y="4443984"/>
             <a:ext cx="5394960" cy="1810512"/>
           </a:xfrm>
           <a:prstGeom prst="roundRect">
@@ -6847,13 +6925,13 @@
       </p:sp>
       <p:sp>
         <p:nvSpPr>
-          <p:cNvPr id="15" name="Shape 13"/>
+          <p:cNvPr id="16" name="Shape 14"/>
           <p:cNvSpPr/>
           <p:nvPr/>
         </p:nvSpPr>
         <p:spPr>
           <a:xfrm>
-            <a:off x="822960" y="4407408"/>
+            <a:off x="822960" y="4736592"/>
             <a:ext cx="548640" cy="548640"/>
           </a:xfrm>
           <a:prstGeom prst="ellipse">
@@ -6867,13 +6945,13 @@
       </p:sp>
       <p:sp>
         <p:nvSpPr>
-          <p:cNvPr id="16" name="Text 14"/>
-          <p:cNvSpPr txBox="1"/>
-          <p:nvPr/>
-        </p:nvSpPr>
-        <p:spPr>
-          <a:xfrm>
-            <a:off x="822960" y="4407408"/>
+          <p:cNvPr id="17" name="Text 15"/>
+          <p:cNvSpPr txBox="1"/>
+          <p:nvPr/>
+        </p:nvSpPr>
+        <p:spPr>
+          <a:xfrm>
+            <a:off x="822960" y="4736592"/>
             <a:ext cx="548640" cy="548640"/>
           </a:xfrm>
           <a:prstGeom prst="rect">
@@ -6906,13 +6984,13 @@
       </p:sp>
       <p:sp>
         <p:nvSpPr>
-          <p:cNvPr id="17" name="Text 15"/>
-          <p:cNvSpPr txBox="1"/>
-          <p:nvPr/>
-        </p:nvSpPr>
-        <p:spPr>
-          <a:xfrm>
-            <a:off x="1508760" y="4370832"/>
+          <p:cNvPr id="18" name="Text 16"/>
+          <p:cNvSpPr txBox="1"/>
+          <p:nvPr/>
+        </p:nvSpPr>
+        <p:spPr>
+          <a:xfrm>
+            <a:off x="1508760" y="4700016"/>
             <a:ext cx="4206240" cy="548640"/>
           </a:xfrm>
           <a:prstGeom prst="rect">
@@ -6945,13 +7023,13 @@
       </p:sp>
       <p:sp>
         <p:nvSpPr>
-          <p:cNvPr id="18" name="Text 16"/>
-          <p:cNvSpPr txBox="1"/>
-          <p:nvPr/>
-        </p:nvSpPr>
-        <p:spPr>
-          <a:xfrm>
-            <a:off x="822960" y="5029200"/>
+          <p:cNvPr id="19" name="Text 17"/>
+          <p:cNvSpPr txBox="1"/>
+          <p:nvPr/>
+        </p:nvSpPr>
+        <p:spPr>
+          <a:xfrm>
+            <a:off x="822960" y="5358384"/>
             <a:ext cx="4846320" cy="822960"/>
           </a:xfrm>
           <a:prstGeom prst="rect">
@@ -6984,13 +7062,13 @@
       </p:sp>
       <p:sp>
         <p:nvSpPr>
-          <p:cNvPr id="19" name="Shape 17"/>
+          <p:cNvPr id="20" name="Shape 18"/>
           <p:cNvSpPr/>
           <p:nvPr/>
         </p:nvSpPr>
         <p:spPr>
           <a:xfrm>
-            <a:off x="6245352" y="4114800"/>
+            <a:off x="6245352" y="4443984"/>
             <a:ext cx="5394960" cy="1810512"/>
           </a:xfrm>
           <a:prstGeom prst="roundRect">
@@ -7011,13 +7089,13 @@
       </p:sp>
       <p:sp>
         <p:nvSpPr>
-          <p:cNvPr id="20" name="Shape 18"/>
+          <p:cNvPr id="21" name="Shape 19"/>
           <p:cNvSpPr/>
           <p:nvPr/>
         </p:nvSpPr>
         <p:spPr>
           <a:xfrm>
-            <a:off x="6519672" y="4407408"/>
+            <a:off x="6519672" y="4736592"/>
             <a:ext cx="548640" cy="548640"/>
           </a:xfrm>
           <a:prstGeom prst="ellipse">
@@ -7031,13 +7109,13 @@
       </p:sp>
       <p:sp>
         <p:nvSpPr>
-          <p:cNvPr id="21" name="Text 19"/>
-          <p:cNvSpPr txBox="1"/>
-          <p:nvPr/>
-        </p:nvSpPr>
-        <p:spPr>
-          <a:xfrm>
-            <a:off x="6519672" y="4407408"/>
+          <p:cNvPr id="22" name="Text 20"/>
+          <p:cNvSpPr txBox="1"/>
+          <p:nvPr/>
+        </p:nvSpPr>
+        <p:spPr>
+          <a:xfrm>
+            <a:off x="6519672" y="4736592"/>
             <a:ext cx="548640" cy="548640"/>
           </a:xfrm>
           <a:prstGeom prst="rect">
@@ -7070,13 +7148,13 @@
       </p:sp>
       <p:sp>
         <p:nvSpPr>
-          <p:cNvPr id="22" name="Text 20"/>
-          <p:cNvSpPr txBox="1"/>
-          <p:nvPr/>
-        </p:nvSpPr>
-        <p:spPr>
-          <a:xfrm>
-            <a:off x="7205472" y="4370832"/>
+          <p:cNvPr id="23" name="Text 21"/>
+          <p:cNvSpPr txBox="1"/>
+          <p:nvPr/>
+        </p:nvSpPr>
+        <p:spPr>
+          <a:xfrm>
+            <a:off x="7205472" y="4700016"/>
             <a:ext cx="4206240" cy="548640"/>
           </a:xfrm>
           <a:prstGeom prst="rect">
@@ -7109,13 +7187,13 @@
       </p:sp>
       <p:sp>
         <p:nvSpPr>
-          <p:cNvPr id="23" name="Text 21"/>
-          <p:cNvSpPr txBox="1"/>
-          <p:nvPr/>
-        </p:nvSpPr>
-        <p:spPr>
-          <a:xfrm>
-            <a:off x="6519672" y="5029200"/>
+          <p:cNvPr id="24" name="Text 22"/>
+          <p:cNvSpPr txBox="1"/>
+          <p:nvPr/>
+        </p:nvSpPr>
+        <p:spPr>
+          <a:xfrm>
+            <a:off x="6519672" y="5358384"/>
             <a:ext cx="4846320" cy="822960"/>
           </a:xfrm>
           <a:prstGeom prst="rect">
@@ -7148,7 +7226,7 @@
       </p:sp>
       <p:sp>
         <p:nvSpPr>
-          <p:cNvPr id="24" name="Shape 22"/>
+          <p:cNvPr id="25" name="Shape 23"/>
           <p:cNvSpPr/>
           <p:nvPr/>
         </p:nvSpPr>
@@ -7170,7 +7248,7 @@
       </p:sp>
       <p:sp>
         <p:nvSpPr>
-          <p:cNvPr id="25" name="Text 23"/>
+          <p:cNvPr id="26" name="Text 24"/>
           <p:cNvSpPr txBox="1"/>
           <p:nvPr/>
         </p:nvSpPr>
@@ -7209,7 +7287,7 @@
       </p:sp>
       <p:sp>
         <p:nvSpPr>
-          <p:cNvPr id="26" name="Text 24"/>
+          <p:cNvPr id="27" name="Text 25"/>
           <p:cNvSpPr txBox="1"/>
           <p:nvPr/>
         </p:nvSpPr>
@@ -7248,7 +7326,7 @@
       </p:sp>
       <p:sp>
         <p:nvSpPr>
-          <p:cNvPr id="27" name="Text 25"/>
+          <p:cNvPr id="28" name="Text 26"/>
           <p:cNvSpPr txBox="1"/>
           <p:nvPr/>
         </p:nvSpPr>
@@ -7403,8 +7481,47 @@
         </p:nvSpPr>
         <p:spPr>
           <a:xfrm>
-            <a:off x="548640" y="2057400"/>
-            <a:ext cx="4709160" cy="3749040"/>
+            <a:off x="548640" y="1627632"/>
+            <a:ext cx="10881360" cy="502920"/>
+          </a:xfrm>
+          <a:prstGeom prst="rect">
+            <a:avLst/>
+          </a:prstGeom>
+          <a:noFill/>
+          <a:ln/>
+        </p:spPr>
+        <p:txBody>
+          <a:bodyPr wrap="square" lIns="0" tIns="0" rIns="0" bIns="0" rtlCol="0" anchor="t"/>
+          <a:lstStyle/>
+          <a:p>
+            <a:pPr algn="l" indent="0" marL="0">
+              <a:buNone/>
+            </a:pPr>
+            <a:r>
+              <a:rPr lang="en-US" sz="1500" dirty="0">
+                <a:solidFill>
+                  <a:srgbClr val="A9B1D6"/>
+                </a:solidFill>
+                <a:latin typeface="Calibri" pitchFamily="34" charset="0"/>
+                <a:ea typeface="Calibri" pitchFamily="34" charset="-122"/>
+                <a:cs typeface="Calibri" pitchFamily="34" charset="-120"/>
+              </a:rPr>
+              <a:t>The simplest move is to just ask — the trick is asking precisely enough that there's only one reasonable answer.</a:t>
+            </a:r>
+            <a:endParaRPr lang="en-US" sz="1500" dirty="0"/>
+          </a:p>
+        </p:txBody>
+      </p:sp>
+      <p:sp>
+        <p:nvSpPr>
+          <p:cNvPr id="5" name="Text 3"/>
+          <p:cNvSpPr txBox="1"/>
+          <p:nvPr/>
+        </p:nvSpPr>
+        <p:spPr>
+          <a:xfrm>
+            <a:off x="548640" y="2386584"/>
+            <a:ext cx="4709160" cy="3419856"/>
           </a:xfrm>
           <a:prstGeom prst="rect">
             <a:avLst/>
@@ -7542,18 +7659,18 @@
       </p:sp>
       <p:sp>
         <p:nvSpPr>
-          <p:cNvPr id="5" name="Shape 3"/>
+          <p:cNvPr id="6" name="Shape 4"/>
           <p:cNvSpPr/>
           <p:nvPr/>
         </p:nvSpPr>
         <p:spPr>
           <a:xfrm>
-            <a:off x="5532120" y="2057400"/>
-            <a:ext cx="6108192" cy="3794760"/>
+            <a:off x="5532120" y="2386584"/>
+            <a:ext cx="6108192" cy="3465576"/>
           </a:xfrm>
           <a:prstGeom prst="roundRect">
             <a:avLst>
-              <a:gd name="adj" fmla="val 1446"/>
+              <a:gd name="adj" fmla="val 1583"/>
             </a:avLst>
           </a:prstGeom>
           <a:solidFill>
@@ -7569,13 +7686,13 @@
       </p:sp>
       <p:sp>
         <p:nvSpPr>
-          <p:cNvPr id="6" name="Text 4"/>
-          <p:cNvSpPr txBox="1"/>
-          <p:nvPr/>
-        </p:nvSpPr>
-        <p:spPr>
-          <a:xfrm>
-            <a:off x="5760720" y="2194560"/>
+          <p:cNvPr id="7" name="Text 5"/>
+          <p:cNvSpPr txBox="1"/>
+          <p:nvPr/>
+        </p:nvSpPr>
+        <p:spPr>
+          <a:xfrm>
+            <a:off x="5760720" y="2523744"/>
             <a:ext cx="5650992" cy="320040"/>
           </a:xfrm>
           <a:prstGeom prst="rect">
@@ -7608,14 +7725,14 @@
       </p:sp>
       <p:sp>
         <p:nvSpPr>
-          <p:cNvPr id="7" name="Text 5"/>
-          <p:cNvSpPr txBox="1"/>
-          <p:nvPr/>
-        </p:nvSpPr>
-        <p:spPr>
-          <a:xfrm>
-            <a:off x="5788152" y="2560320"/>
-            <a:ext cx="5596128" cy="3108960"/>
+          <p:cNvPr id="8" name="Text 6"/>
+          <p:cNvSpPr txBox="1"/>
+          <p:nvPr/>
+        </p:nvSpPr>
+        <p:spPr>
+          <a:xfrm>
+            <a:off x="5788152" y="2889504"/>
+            <a:ext cx="5596128" cy="2779776"/>
           </a:xfrm>
           <a:prstGeom prst="rect">
             <a:avLst/>
@@ -7807,7 +7924,7 @@
       </p:sp>
       <p:sp>
         <p:nvSpPr>
-          <p:cNvPr id="8" name="Shape 6"/>
+          <p:cNvPr id="9" name="Shape 7"/>
           <p:cNvSpPr/>
           <p:nvPr/>
         </p:nvSpPr>
@@ -7829,7 +7946,7 @@
       </p:sp>
       <p:sp>
         <p:nvSpPr>
-          <p:cNvPr id="9" name="Text 7"/>
+          <p:cNvPr id="10" name="Text 8"/>
           <p:cNvSpPr txBox="1"/>
           <p:nvPr/>
         </p:nvSpPr>
@@ -7868,7 +7985,7 @@
       </p:sp>
       <p:sp>
         <p:nvSpPr>
-          <p:cNvPr id="10" name="Text 8"/>
+          <p:cNvPr id="11" name="Text 9"/>
           <p:cNvSpPr txBox="1"/>
           <p:nvPr/>
         </p:nvSpPr>
@@ -7907,7 +8024,7 @@
       </p:sp>
       <p:sp>
         <p:nvSpPr>
-          <p:cNvPr id="11" name="Text 9"/>
+          <p:cNvPr id="12" name="Text 10"/>
           <p:cNvSpPr txBox="1"/>
           <p:nvPr/>
         </p:nvSpPr>
@@ -8062,8 +8179,47 @@
         </p:nvSpPr>
         <p:spPr>
           <a:xfrm>
-            <a:off x="548640" y="2057400"/>
-            <a:ext cx="4709160" cy="3749040"/>
+            <a:off x="548640" y="1627632"/>
+            <a:ext cx="10881360" cy="502920"/>
+          </a:xfrm>
+          <a:prstGeom prst="rect">
+            <a:avLst/>
+          </a:prstGeom>
+          <a:noFill/>
+          <a:ln/>
+        </p:spPr>
+        <p:txBody>
+          <a:bodyPr wrap="square" lIns="0" tIns="0" rIns="0" bIns="0" rtlCol="0" anchor="t"/>
+          <a:lstStyle/>
+          <a:p>
+            <a:pPr algn="l" indent="0" marL="0">
+              <a:buNone/>
+            </a:pPr>
+            <a:r>
+              <a:rPr lang="en-US" sz="1500" dirty="0">
+                <a:solidFill>
+                  <a:srgbClr val="A9B1D6"/>
+                </a:solidFill>
+                <a:latin typeface="Calibri" pitchFamily="34" charset="0"/>
+                <a:ea typeface="Calibri" pitchFamily="34" charset="-122"/>
+                <a:cs typeface="Calibri" pitchFamily="34" charset="-120"/>
+              </a:rPr>
+              <a:t>When words alone aren't landing, stop explaining and start showing — a few examples often do what a paragraph can't.</a:t>
+            </a:r>
+            <a:endParaRPr lang="en-US" sz="1500" dirty="0"/>
+          </a:p>
+        </p:txBody>
+      </p:sp>
+      <p:sp>
+        <p:nvSpPr>
+          <p:cNvPr id="5" name="Text 3"/>
+          <p:cNvSpPr txBox="1"/>
+          <p:nvPr/>
+        </p:nvSpPr>
+        <p:spPr>
+          <a:xfrm>
+            <a:off x="548640" y="2386584"/>
+            <a:ext cx="4709160" cy="3419856"/>
           </a:xfrm>
           <a:prstGeom prst="rect">
             <a:avLst/>
@@ -8201,18 +8357,18 @@
       </p:sp>
       <p:sp>
         <p:nvSpPr>
-          <p:cNvPr id="5" name="Shape 3"/>
+          <p:cNvPr id="6" name="Shape 4"/>
           <p:cNvSpPr/>
           <p:nvPr/>
         </p:nvSpPr>
         <p:spPr>
           <a:xfrm>
-            <a:off x="5532120" y="2057400"/>
-            <a:ext cx="6108192" cy="3794760"/>
+            <a:off x="5532120" y="2386584"/>
+            <a:ext cx="6108192" cy="3465576"/>
           </a:xfrm>
           <a:prstGeom prst="roundRect">
             <a:avLst>
-              <a:gd name="adj" fmla="val 1446"/>
+              <a:gd name="adj" fmla="val 1583"/>
             </a:avLst>
           </a:prstGeom>
           <a:solidFill>
@@ -8228,13 +8384,13 @@
       </p:sp>
       <p:sp>
         <p:nvSpPr>
-          <p:cNvPr id="6" name="Text 4"/>
-          <p:cNvSpPr txBox="1"/>
-          <p:nvPr/>
-        </p:nvSpPr>
-        <p:spPr>
-          <a:xfrm>
-            <a:off x="5760720" y="2194560"/>
+          <p:cNvPr id="7" name="Text 5"/>
+          <p:cNvSpPr txBox="1"/>
+          <p:nvPr/>
+        </p:nvSpPr>
+        <p:spPr>
+          <a:xfrm>
+            <a:off x="5760720" y="2523744"/>
             <a:ext cx="5650992" cy="320040"/>
           </a:xfrm>
           <a:prstGeom prst="rect">
@@ -8267,14 +8423,14 @@
       </p:sp>
       <p:sp>
         <p:nvSpPr>
-          <p:cNvPr id="7" name="Text 5"/>
-          <p:cNvSpPr txBox="1"/>
-          <p:nvPr/>
-        </p:nvSpPr>
-        <p:spPr>
-          <a:xfrm>
-            <a:off x="5788152" y="2560320"/>
-            <a:ext cx="5596128" cy="3108960"/>
+          <p:cNvPr id="8" name="Text 6"/>
+          <p:cNvSpPr txBox="1"/>
+          <p:nvPr/>
+        </p:nvSpPr>
+        <p:spPr>
+          <a:xfrm>
+            <a:off x="5788152" y="2889504"/>
+            <a:ext cx="5596128" cy="2779776"/>
           </a:xfrm>
           <a:prstGeom prst="rect">
             <a:avLst/>
@@ -8457,7 +8613,7 @@
       </p:sp>
       <p:sp>
         <p:nvSpPr>
-          <p:cNvPr id="8" name="Shape 6"/>
+          <p:cNvPr id="9" name="Shape 7"/>
           <p:cNvSpPr/>
           <p:nvPr/>
         </p:nvSpPr>
@@ -8479,7 +8635,7 @@
       </p:sp>
       <p:sp>
         <p:nvSpPr>
-          <p:cNvPr id="9" name="Text 7"/>
+          <p:cNvPr id="10" name="Text 8"/>
           <p:cNvSpPr txBox="1"/>
           <p:nvPr/>
         </p:nvSpPr>
@@ -8518,7 +8674,7 @@
       </p:sp>
       <p:sp>
         <p:nvSpPr>
-          <p:cNvPr id="10" name="Text 8"/>
+          <p:cNvPr id="11" name="Text 9"/>
           <p:cNvSpPr txBox="1"/>
           <p:nvPr/>
         </p:nvSpPr>
@@ -8557,7 +8713,7 @@
       </p:sp>
       <p:sp>
         <p:nvSpPr>
-          <p:cNvPr id="11" name="Text 9"/>
+          <p:cNvPr id="12" name="Text 10"/>
           <p:cNvSpPr txBox="1"/>
           <p:nvPr/>
         </p:nvSpPr>
@@ -8712,8 +8868,47 @@
         </p:nvSpPr>
         <p:spPr>
           <a:xfrm>
-            <a:off x="548640" y="2011680"/>
-            <a:ext cx="6126480" cy="3840480"/>
+            <a:off x="548640" y="1627632"/>
+            <a:ext cx="10881360" cy="502920"/>
+          </a:xfrm>
+          <a:prstGeom prst="rect">
+            <a:avLst/>
+          </a:prstGeom>
+          <a:noFill/>
+          <a:ln/>
+        </p:spPr>
+        <p:txBody>
+          <a:bodyPr wrap="square" lIns="0" tIns="0" rIns="0" bIns="0" rtlCol="0" anchor="t"/>
+          <a:lstStyle/>
+          <a:p>
+            <a:pPr algn="l" indent="0" marL="0">
+              <a:buNone/>
+            </a:pPr>
+            <a:r>
+              <a:rPr lang="en-US" sz="1500" dirty="0">
+                <a:solidFill>
+                  <a:srgbClr val="A9B1D6"/>
+                </a:solidFill>
+                <a:latin typeface="Calibri" pitchFamily="34" charset="0"/>
+                <a:ea typeface="Calibri" pitchFamily="34" charset="-122"/>
+                <a:cs typeface="Calibri" pitchFamily="34" charset="-120"/>
+              </a:rPr>
+              <a:t>Two quiet levers that shape a lot: who you tell the model to be, and how you fence off the parts of your prompt.</a:t>
+            </a:r>
+            <a:endParaRPr lang="en-US" sz="1500" dirty="0"/>
+          </a:p>
+        </p:txBody>
+      </p:sp>
+      <p:sp>
+        <p:nvSpPr>
+          <p:cNvPr id="5" name="Text 3"/>
+          <p:cNvSpPr txBox="1"/>
+          <p:nvPr/>
+        </p:nvSpPr>
+        <p:spPr>
+          <a:xfrm>
+            <a:off x="548640" y="2340864"/>
+            <a:ext cx="6126480" cy="3511296"/>
           </a:xfrm>
           <a:prstGeom prst="rect">
             <a:avLst/>
@@ -8851,18 +9046,18 @@
       </p:sp>
       <p:sp>
         <p:nvSpPr>
-          <p:cNvPr id="5" name="Shape 3"/>
+          <p:cNvPr id="6" name="Shape 4"/>
           <p:cNvSpPr/>
           <p:nvPr/>
         </p:nvSpPr>
         <p:spPr>
           <a:xfrm>
-            <a:off x="6995160" y="2148840"/>
-            <a:ext cx="4645152" cy="3383280"/>
+            <a:off x="6995160" y="2478024"/>
+            <a:ext cx="4645152" cy="3054096"/>
           </a:xfrm>
           <a:prstGeom prst="roundRect">
             <a:avLst>
-              <a:gd name="adj" fmla="val 2432"/>
+              <a:gd name="adj" fmla="val 2695"/>
             </a:avLst>
           </a:prstGeom>
           <a:solidFill>
@@ -8878,13 +9073,13 @@
       </p:sp>
       <p:sp>
         <p:nvSpPr>
-          <p:cNvPr id="6" name="Shape 4"/>
+          <p:cNvPr id="7" name="Shape 5"/>
           <p:cNvSpPr/>
           <p:nvPr/>
         </p:nvSpPr>
         <p:spPr>
           <a:xfrm>
-            <a:off x="7269480" y="2423160"/>
+            <a:off x="7269480" y="2752344"/>
             <a:ext cx="457200" cy="457200"/>
           </a:xfrm>
           <a:prstGeom prst="ellipse">
@@ -8898,13 +9093,13 @@
       </p:sp>
       <p:sp>
         <p:nvSpPr>
-          <p:cNvPr id="7" name="Text 5"/>
-          <p:cNvSpPr txBox="1"/>
-          <p:nvPr/>
-        </p:nvSpPr>
-        <p:spPr>
-          <a:xfrm>
-            <a:off x="7818120" y="2450592"/>
+          <p:cNvPr id="8" name="Text 6"/>
+          <p:cNvSpPr txBox="1"/>
+          <p:nvPr/>
+        </p:nvSpPr>
+        <p:spPr>
+          <a:xfrm>
+            <a:off x="7818120" y="2779776"/>
             <a:ext cx="3657600" cy="411480"/>
           </a:xfrm>
           <a:prstGeom prst="rect">
@@ -8937,14 +9132,14 @@
       </p:sp>
       <p:sp>
         <p:nvSpPr>
-          <p:cNvPr id="8" name="Text 6"/>
-          <p:cNvSpPr txBox="1"/>
-          <p:nvPr/>
-        </p:nvSpPr>
-        <p:spPr>
-          <a:xfrm>
-            <a:off x="7269480" y="3108960"/>
-            <a:ext cx="4160520" cy="2286000"/>
+          <p:cNvPr id="9" name="Text 7"/>
+          <p:cNvSpPr txBox="1"/>
+          <p:nvPr/>
+        </p:nvSpPr>
+        <p:spPr>
+          <a:xfrm>
+            <a:off x="7269480" y="3438144"/>
+            <a:ext cx="4160520" cy="1865376"/>
           </a:xfrm>
           <a:prstGeom prst="rect">
             <a:avLst/>
@@ -8976,7 +9171,7 @@
       </p:sp>
       <p:sp>
         <p:nvSpPr>
-          <p:cNvPr id="9" name="Shape 7"/>
+          <p:cNvPr id="10" name="Shape 8"/>
           <p:cNvSpPr/>
           <p:nvPr/>
         </p:nvSpPr>
@@ -8998,7 +9193,7 @@
       </p:sp>
       <p:sp>
         <p:nvSpPr>
-          <p:cNvPr id="10" name="Text 8"/>
+          <p:cNvPr id="11" name="Text 9"/>
           <p:cNvSpPr txBox="1"/>
           <p:nvPr/>
         </p:nvSpPr>
@@ -9037,7 +9232,7 @@
       </p:sp>
       <p:sp>
         <p:nvSpPr>
-          <p:cNvPr id="11" name="Text 9"/>
+          <p:cNvPr id="12" name="Text 10"/>
           <p:cNvSpPr txBox="1"/>
           <p:nvPr/>
         </p:nvSpPr>
@@ -9076,7 +9271,7 @@
       </p:sp>
       <p:sp>
         <p:nvSpPr>
-          <p:cNvPr id="12" name="Text 10"/>
+          <p:cNvPr id="13" name="Text 11"/>
           <p:cNvSpPr txBox="1"/>
           <p:nvPr/>
         </p:nvSpPr>
@@ -9225,13 +9420,52 @@
       </p:sp>
       <p:sp>
         <p:nvSpPr>
-          <p:cNvPr id="4" name="Shape 2"/>
+          <p:cNvPr id="4" name="Text 2"/>
+          <p:cNvSpPr txBox="1"/>
+          <p:nvPr/>
+        </p:nvSpPr>
+        <p:spPr>
+          <a:xfrm>
+            <a:off x="548640" y="1627632"/>
+            <a:ext cx="10881360" cy="502920"/>
+          </a:xfrm>
+          <a:prstGeom prst="rect">
+            <a:avLst/>
+          </a:prstGeom>
+          <a:noFill/>
+          <a:ln/>
+        </p:spPr>
+        <p:txBody>
+          <a:bodyPr wrap="square" lIns="0" tIns="0" rIns="0" bIns="0" rtlCol="0" anchor="t"/>
+          <a:lstStyle/>
+          <a:p>
+            <a:pPr algn="l" indent="0" marL="0">
+              <a:buNone/>
+            </a:pPr>
+            <a:r>
+              <a:rPr lang="en-US" sz="1500" dirty="0">
+                <a:solidFill>
+                  <a:srgbClr val="A9B1D6"/>
+                </a:solidFill>
+                <a:latin typeface="Calibri" pitchFamily="34" charset="0"/>
+                <a:ea typeface="Calibri" pitchFamily="34" charset="-122"/>
+                <a:cs typeface="Calibri" pitchFamily="34" charset="-120"/>
+              </a:rPr>
+              <a:t>There's no single 'good prompt' — the right shape depends on what kind of job you're asking for.</a:t>
+            </a:r>
+            <a:endParaRPr lang="en-US" sz="1500" dirty="0"/>
+          </a:p>
+        </p:txBody>
+      </p:sp>
+      <p:sp>
+        <p:nvSpPr>
+          <p:cNvPr id="5" name="Shape 3"/>
           <p:cNvSpPr/>
           <p:nvPr/>
         </p:nvSpPr>
         <p:spPr>
           <a:xfrm>
-            <a:off x="548640" y="2103120"/>
+            <a:off x="548640" y="2432304"/>
             <a:ext cx="5394960" cy="1810512"/>
           </a:xfrm>
           <a:prstGeom prst="roundRect">
@@ -9252,13 +9486,13 @@
       </p:sp>
       <p:sp>
         <p:nvSpPr>
-          <p:cNvPr id="5" name="Shape 3"/>
+          <p:cNvPr id="6" name="Shape 4"/>
           <p:cNvSpPr/>
           <p:nvPr/>
         </p:nvSpPr>
         <p:spPr>
           <a:xfrm>
-            <a:off x="822960" y="2395728"/>
+            <a:off x="822960" y="2724912"/>
             <a:ext cx="548640" cy="548640"/>
           </a:xfrm>
           <a:prstGeom prst="ellipse">
@@ -9272,13 +9506,13 @@
       </p:sp>
       <p:sp>
         <p:nvSpPr>
-          <p:cNvPr id="6" name="Text 4"/>
-          <p:cNvSpPr txBox="1"/>
-          <p:nvPr/>
-        </p:nvSpPr>
-        <p:spPr>
-          <a:xfrm>
-            <a:off x="822960" y="2395728"/>
+          <p:cNvPr id="7" name="Text 5"/>
+          <p:cNvSpPr txBox="1"/>
+          <p:nvPr/>
+        </p:nvSpPr>
+        <p:spPr>
+          <a:xfrm>
+            <a:off x="822960" y="2724912"/>
             <a:ext cx="548640" cy="548640"/>
           </a:xfrm>
           <a:prstGeom prst="rect">
@@ -9311,13 +9545,13 @@
       </p:sp>
       <p:sp>
         <p:nvSpPr>
-          <p:cNvPr id="7" name="Text 5"/>
-          <p:cNvSpPr txBox="1"/>
-          <p:nvPr/>
-        </p:nvSpPr>
-        <p:spPr>
-          <a:xfrm>
-            <a:off x="1508760" y="2359152"/>
+          <p:cNvPr id="8" name="Text 6"/>
+          <p:cNvSpPr txBox="1"/>
+          <p:nvPr/>
+        </p:nvSpPr>
+        <p:spPr>
+          <a:xfrm>
+            <a:off x="1508760" y="2688336"/>
             <a:ext cx="4206240" cy="548640"/>
           </a:xfrm>
           <a:prstGeom prst="rect">
@@ -9350,13 +9584,13 @@
       </p:sp>
       <p:sp>
         <p:nvSpPr>
-          <p:cNvPr id="8" name="Text 6"/>
-          <p:cNvSpPr txBox="1"/>
-          <p:nvPr/>
-        </p:nvSpPr>
-        <p:spPr>
-          <a:xfrm>
-            <a:off x="822960" y="3017520"/>
+          <p:cNvPr id="9" name="Text 7"/>
+          <p:cNvSpPr txBox="1"/>
+          <p:nvPr/>
+        </p:nvSpPr>
+        <p:spPr>
+          <a:xfrm>
+            <a:off x="822960" y="3346704"/>
             <a:ext cx="4846320" cy="822960"/>
           </a:xfrm>
           <a:prstGeom prst="rect">
@@ -9389,13 +9623,13 @@
       </p:sp>
       <p:sp>
         <p:nvSpPr>
-          <p:cNvPr id="9" name="Shape 7"/>
+          <p:cNvPr id="10" name="Shape 8"/>
           <p:cNvSpPr/>
           <p:nvPr/>
         </p:nvSpPr>
         <p:spPr>
           <a:xfrm>
-            <a:off x="6245352" y="2103120"/>
+            <a:off x="6245352" y="2432304"/>
             <a:ext cx="5394960" cy="1810512"/>
           </a:xfrm>
           <a:prstGeom prst="roundRect">
@@ -9416,13 +9650,13 @@
       </p:sp>
       <p:sp>
         <p:nvSpPr>
-          <p:cNvPr id="10" name="Shape 8"/>
+          <p:cNvPr id="11" name="Shape 9"/>
           <p:cNvSpPr/>
           <p:nvPr/>
         </p:nvSpPr>
         <p:spPr>
           <a:xfrm>
-            <a:off x="6519672" y="2395728"/>
+            <a:off x="6519672" y="2724912"/>
             <a:ext cx="548640" cy="548640"/>
           </a:xfrm>
           <a:prstGeom prst="ellipse">
@@ -9436,13 +9670,13 @@
       </p:sp>
       <p:sp>
         <p:nvSpPr>
-          <p:cNvPr id="11" name="Text 9"/>
-          <p:cNvSpPr txBox="1"/>
-          <p:nvPr/>
-        </p:nvSpPr>
-        <p:spPr>
-          <a:xfrm>
-            <a:off x="6519672" y="2395728"/>
+          <p:cNvPr id="12" name="Text 10"/>
+          <p:cNvSpPr txBox="1"/>
+          <p:nvPr/>
+        </p:nvSpPr>
+        <p:spPr>
+          <a:xfrm>
+            <a:off x="6519672" y="2724912"/>
             <a:ext cx="548640" cy="548640"/>
           </a:xfrm>
           <a:prstGeom prst="rect">
@@ -9475,13 +9709,13 @@
       </p:sp>
       <p:sp>
         <p:nvSpPr>
-          <p:cNvPr id="12" name="Text 10"/>
-          <p:cNvSpPr txBox="1"/>
-          <p:nvPr/>
-        </p:nvSpPr>
-        <p:spPr>
-          <a:xfrm>
-            <a:off x="7205472" y="2359152"/>
+          <p:cNvPr id="13" name="Text 11"/>
+          <p:cNvSpPr txBox="1"/>
+          <p:nvPr/>
+        </p:nvSpPr>
+        <p:spPr>
+          <a:xfrm>
+            <a:off x="7205472" y="2688336"/>
             <a:ext cx="4206240" cy="548640"/>
           </a:xfrm>
           <a:prstGeom prst="rect">
@@ -9514,13 +9748,13 @@
       </p:sp>
       <p:sp>
         <p:nvSpPr>
-          <p:cNvPr id="13" name="Text 11"/>
-          <p:cNvSpPr txBox="1"/>
-          <p:nvPr/>
-        </p:nvSpPr>
-        <p:spPr>
-          <a:xfrm>
-            <a:off x="6519672" y="3017520"/>
+          <p:cNvPr id="14" name="Text 12"/>
+          <p:cNvSpPr txBox="1"/>
+          <p:nvPr/>
+        </p:nvSpPr>
+        <p:spPr>
+          <a:xfrm>
+            <a:off x="6519672" y="3346704"/>
             <a:ext cx="4846320" cy="822960"/>
           </a:xfrm>
           <a:prstGeom prst="rect">
@@ -9553,13 +9787,13 @@
       </p:sp>
       <p:sp>
         <p:nvSpPr>
-          <p:cNvPr id="14" name="Shape 12"/>
+          <p:cNvPr id="15" name="Shape 13"/>
           <p:cNvSpPr/>
           <p:nvPr/>
         </p:nvSpPr>
         <p:spPr>
           <a:xfrm>
-            <a:off x="548640" y="4114800"/>
+            <a:off x="548640" y="4443984"/>
             <a:ext cx="5394960" cy="1810512"/>
           </a:xfrm>
           <a:prstGeom prst="roundRect">
@@ -9580,13 +9814,13 @@
       </p:sp>
       <p:sp>
         <p:nvSpPr>
-          <p:cNvPr id="15" name="Shape 13"/>
+          <p:cNvPr id="16" name="Shape 14"/>
           <p:cNvSpPr/>
           <p:nvPr/>
         </p:nvSpPr>
         <p:spPr>
           <a:xfrm>
-            <a:off x="822960" y="4407408"/>
+            <a:off x="822960" y="4736592"/>
             <a:ext cx="548640" cy="548640"/>
           </a:xfrm>
           <a:prstGeom prst="ellipse">
@@ -9600,13 +9834,13 @@
       </p:sp>
       <p:sp>
         <p:nvSpPr>
-          <p:cNvPr id="16" name="Text 14"/>
-          <p:cNvSpPr txBox="1"/>
-          <p:nvPr/>
-        </p:nvSpPr>
-        <p:spPr>
-          <a:xfrm>
-            <a:off x="822960" y="4407408"/>
+          <p:cNvPr id="17" name="Text 15"/>
+          <p:cNvSpPr txBox="1"/>
+          <p:nvPr/>
+        </p:nvSpPr>
+        <p:spPr>
+          <a:xfrm>
+            <a:off x="822960" y="4736592"/>
             <a:ext cx="548640" cy="548640"/>
           </a:xfrm>
           <a:prstGeom prst="rect">
@@ -9639,13 +9873,13 @@
       </p:sp>
       <p:sp>
         <p:nvSpPr>
-          <p:cNvPr id="17" name="Text 15"/>
-          <p:cNvSpPr txBox="1"/>
-          <p:nvPr/>
-        </p:nvSpPr>
-        <p:spPr>
-          <a:xfrm>
-            <a:off x="1508760" y="4370832"/>
+          <p:cNvPr id="18" name="Text 16"/>
+          <p:cNvSpPr txBox="1"/>
+          <p:nvPr/>
+        </p:nvSpPr>
+        <p:spPr>
+          <a:xfrm>
+            <a:off x="1508760" y="4700016"/>
             <a:ext cx="4206240" cy="548640"/>
           </a:xfrm>
           <a:prstGeom prst="rect">
@@ -9678,13 +9912,13 @@
       </p:sp>
       <p:sp>
         <p:nvSpPr>
-          <p:cNvPr id="18" name="Text 16"/>
-          <p:cNvSpPr txBox="1"/>
-          <p:nvPr/>
-        </p:nvSpPr>
-        <p:spPr>
-          <a:xfrm>
-            <a:off x="822960" y="5029200"/>
+          <p:cNvPr id="19" name="Text 17"/>
+          <p:cNvSpPr txBox="1"/>
+          <p:nvPr/>
+        </p:nvSpPr>
+        <p:spPr>
+          <a:xfrm>
+            <a:off x="822960" y="5358384"/>
             <a:ext cx="4846320" cy="822960"/>
           </a:xfrm>
           <a:prstGeom prst="rect">
@@ -9717,13 +9951,13 @@
       </p:sp>
       <p:sp>
         <p:nvSpPr>
-          <p:cNvPr id="19" name="Shape 17"/>
+          <p:cNvPr id="20" name="Shape 18"/>
           <p:cNvSpPr/>
           <p:nvPr/>
         </p:nvSpPr>
         <p:spPr>
           <a:xfrm>
-            <a:off x="6245352" y="4114800"/>
+            <a:off x="6245352" y="4443984"/>
             <a:ext cx="5394960" cy="1810512"/>
           </a:xfrm>
           <a:prstGeom prst="roundRect">
@@ -9744,13 +9978,13 @@
       </p:sp>
       <p:sp>
         <p:nvSpPr>
-          <p:cNvPr id="20" name="Shape 18"/>
+          <p:cNvPr id="21" name="Shape 19"/>
           <p:cNvSpPr/>
           <p:nvPr/>
         </p:nvSpPr>
         <p:spPr>
           <a:xfrm>
-            <a:off x="6519672" y="4407408"/>
+            <a:off x="6519672" y="4736592"/>
             <a:ext cx="548640" cy="548640"/>
           </a:xfrm>
           <a:prstGeom prst="ellipse">
@@ -9764,13 +9998,13 @@
       </p:sp>
       <p:sp>
         <p:nvSpPr>
-          <p:cNvPr id="21" name="Text 19"/>
-          <p:cNvSpPr txBox="1"/>
-          <p:nvPr/>
-        </p:nvSpPr>
-        <p:spPr>
-          <a:xfrm>
-            <a:off x="6519672" y="4407408"/>
+          <p:cNvPr id="22" name="Text 20"/>
+          <p:cNvSpPr txBox="1"/>
+          <p:nvPr/>
+        </p:nvSpPr>
+        <p:spPr>
+          <a:xfrm>
+            <a:off x="6519672" y="4736592"/>
             <a:ext cx="548640" cy="548640"/>
           </a:xfrm>
           <a:prstGeom prst="rect">
@@ -9803,13 +10037,13 @@
       </p:sp>
       <p:sp>
         <p:nvSpPr>
-          <p:cNvPr id="22" name="Text 20"/>
-          <p:cNvSpPr txBox="1"/>
-          <p:nvPr/>
-        </p:nvSpPr>
-        <p:spPr>
-          <a:xfrm>
-            <a:off x="7205472" y="4370832"/>
+          <p:cNvPr id="23" name="Text 21"/>
+          <p:cNvSpPr txBox="1"/>
+          <p:nvPr/>
+        </p:nvSpPr>
+        <p:spPr>
+          <a:xfrm>
+            <a:off x="7205472" y="4700016"/>
             <a:ext cx="4206240" cy="548640"/>
           </a:xfrm>
           <a:prstGeom prst="rect">
@@ -9842,13 +10076,13 @@
       </p:sp>
       <p:sp>
         <p:nvSpPr>
-          <p:cNvPr id="23" name="Text 21"/>
-          <p:cNvSpPr txBox="1"/>
-          <p:nvPr/>
-        </p:nvSpPr>
-        <p:spPr>
-          <a:xfrm>
-            <a:off x="6519672" y="5029200"/>
+          <p:cNvPr id="24" name="Text 22"/>
+          <p:cNvSpPr txBox="1"/>
+          <p:nvPr/>
+        </p:nvSpPr>
+        <p:spPr>
+          <a:xfrm>
+            <a:off x="6519672" y="5358384"/>
             <a:ext cx="4846320" cy="822960"/>
           </a:xfrm>
           <a:prstGeom prst="rect">
@@ -9881,7 +10115,7 @@
       </p:sp>
       <p:sp>
         <p:nvSpPr>
-          <p:cNvPr id="24" name="Shape 22"/>
+          <p:cNvPr id="25" name="Shape 23"/>
           <p:cNvSpPr/>
           <p:nvPr/>
         </p:nvSpPr>
@@ -9903,7 +10137,7 @@
       </p:sp>
       <p:sp>
         <p:nvSpPr>
-          <p:cNvPr id="25" name="Text 23"/>
+          <p:cNvPr id="26" name="Text 24"/>
           <p:cNvSpPr txBox="1"/>
           <p:nvPr/>
         </p:nvSpPr>
@@ -9942,7 +10176,7 @@
       </p:sp>
       <p:sp>
         <p:nvSpPr>
-          <p:cNvPr id="26" name="Text 24"/>
+          <p:cNvPr id="27" name="Text 25"/>
           <p:cNvSpPr txBox="1"/>
           <p:nvPr/>
         </p:nvSpPr>
@@ -9981,7 +10215,7 @@
       </p:sp>
       <p:sp>
         <p:nvSpPr>
-          <p:cNvPr id="27" name="Text 25"/>
+          <p:cNvPr id="28" name="Text 26"/>
           <p:cNvSpPr txBox="1"/>
           <p:nvPr/>
         </p:nvSpPr>
